--- a/examples/template.pptx
+++ b/examples/template.pptx
@@ -1824,7 +1824,7 @@
 
 <file path=ppt/slideLayouts/slideLayout6.xml><?xml version="1.0" encoding="utf-8"?>
 <p:sldLayout xmlns:a="http://schemas.openxmlformats.org/drawingml/2006/main" xmlns:r="http://schemas.openxmlformats.org/officeDocument/2006/relationships" xmlns:p="http://schemas.openxmlformats.org/presentationml/2006/main" type="titleOnly" preserve="1">
-  <p:cSld name="Title Only">
+  <p:cSld name="TitleOnly">
     <p:spTree>
       <p:nvGrpSpPr>
         <p:cNvPr id="1" name=""/>
@@ -2037,7 +2037,7 @@
 
 <file path=ppt/slideLayouts/slideLayout8.xml><?xml version="1.0" encoding="utf-8"?>
 <p:sldLayout xmlns:a="http://schemas.openxmlformats.org/drawingml/2006/main" xmlns:r="http://schemas.openxmlformats.org/officeDocument/2006/relationships" xmlns:p="http://schemas.openxmlformats.org/presentationml/2006/main" type="objTx" preserve="1">
-  <p:cSld name="Content with Caption">
+  <p:cSld name="Caption">
     <p:spTree>
       <p:nvGrpSpPr>
         <p:cNvPr id="1" name=""/>
@@ -2314,7 +2314,7 @@
 
 <file path=ppt/slideLayouts/slideLayout9.xml><?xml version="1.0" encoding="utf-8"?>
 <p:sldLayout xmlns:a="http://schemas.openxmlformats.org/drawingml/2006/main" xmlns:r="http://schemas.openxmlformats.org/officeDocument/2006/relationships" xmlns:p="http://schemas.openxmlformats.org/presentationml/2006/main" type="picTx" preserve="1">
-  <p:cSld name="Picture with Caption">
+  <p:cSld name="Picture">
     <p:spTree>
       <p:nvGrpSpPr>
         <p:cNvPr id="1" name=""/>
@@ -2844,6 +2844,9 @@
         <a:spcBef>
           <a:spcPct val="20000"/>
         </a:spcBef>
+        <a:buClr>
+          <a:schemeClr val="accent1"/>
+        </a:buClr>
         <a:buFont typeface="Arial"/>
         <a:buChar char="•"/>
         <a:defRPr sz="3200" kern="1200">
@@ -2859,6 +2862,9 @@
         <a:spcBef>
           <a:spcPct val="20000"/>
         </a:spcBef>
+        <a:buClr>
+          <a:schemeClr val="accent2"/>
+        </a:buClr>
         <a:buFont typeface="Arial"/>
         <a:buChar char="–"/>
         <a:defRPr sz="2800" kern="1200">
@@ -2874,6 +2880,9 @@
         <a:spcBef>
           <a:spcPct val="20000"/>
         </a:spcBef>
+        <a:buClr>
+          <a:schemeClr val="accent3"/>
+        </a:buClr>
         <a:buFont typeface="Arial"/>
         <a:buChar char="•"/>
         <a:defRPr sz="2400" kern="1200">

--- a/examples/template.pptx
+++ b/examples/template.pptx
@@ -348,7 +348,7 @@
 
 <file path=ppt/slideLayouts/slideLayout10.xml><?xml version="1.0" encoding="utf-8"?>
 <p:sldLayout xmlns:a="http://schemas.openxmlformats.org/drawingml/2006/main" xmlns:r="http://schemas.openxmlformats.org/officeDocument/2006/relationships" xmlns:p="http://schemas.openxmlformats.org/presentationml/2006/main" type="vertTx" preserve="1">
-  <p:cSld name="Title and Vertical Text">
+  <p:cSld name="Cards">
     <p:spTree>
       <p:nvGrpSpPr>
         <p:cNvPr id="1" name=""/>
@@ -388,58 +388,6 @@
       </p:sp>
       <p:sp>
         <p:nvSpPr>
-          <p:cNvPr id="3" name="Vertical Text Placeholder 2"/>
-          <p:cNvSpPr>
-            <a:spLocks noGrp="1"/>
-          </p:cNvSpPr>
-          <p:nvPr>
-            <p:ph type="body" orient="vert" idx="1"/>
-          </p:nvPr>
-        </p:nvSpPr>
-        <p:spPr/>
-        <p:txBody>
-          <a:bodyPr vert="eaVert"/>
-          <a:lstStyle/>
-          <a:p>
-            <a:pPr lvl="0"/>
-            <a:r>
-              <a:rPr lang="en-US" smtClean="0"/>
-              <a:t>Click to edit Master text styles</a:t>
-            </a:r>
-          </a:p>
-          <a:p>
-            <a:pPr lvl="1"/>
-            <a:r>
-              <a:rPr lang="en-US" smtClean="0"/>
-              <a:t>Second level</a:t>
-            </a:r>
-          </a:p>
-          <a:p>
-            <a:pPr lvl="2"/>
-            <a:r>
-              <a:rPr lang="en-US" smtClean="0"/>
-              <a:t>Third level</a:t>
-            </a:r>
-          </a:p>
-          <a:p>
-            <a:pPr lvl="3"/>
-            <a:r>
-              <a:rPr lang="en-US" smtClean="0"/>
-              <a:t>Fourth level</a:t>
-            </a:r>
-          </a:p>
-          <a:p>
-            <a:pPr lvl="4"/>
-            <a:r>
-              <a:rPr lang="en-US" smtClean="0"/>
-              <a:t>Fifth level</a:t>
-            </a:r>
-            <a:endParaRPr lang="en-US"/>
-          </a:p>
-        </p:txBody>
-      </p:sp>
-      <p:sp>
-        <p:nvSpPr>
           <p:cNvPr id="4" name="Date Placeholder 3"/>
           <p:cNvSpPr>
             <a:spLocks noGrp="1"/>
@@ -500,6 +448,330 @@
               <a:t>‹#›</a:t>
             </a:fld>
             <a:endParaRPr lang="en-US"/>
+          </a:p>
+        </p:txBody>
+      </p:sp>
+      <p:sp>
+        <p:nvSpPr>
+          <p:cNvPr id="21" name="Card 1 Tab"/>
+          <p:cNvSpPr>
+            <a:spLocks noGrp="1"/>
+          </p:cNvSpPr>
+          <p:nvPr>
+            <p:ph type="body" sz="quarter" idx="1"/>
+          </p:nvPr>
+        </p:nvSpPr>
+        <p:spPr>
+          <a:xfrm>
+            <a:off x="301752" y="1645920"/>
+            <a:ext cx="2018538" cy="502920"/>
+          </a:xfrm>
+          <a:prstGeom prst="round2SameRect">
+            <a:avLst>
+              <a:gd name="adj1" fmla="val 25000"/>
+              <a:gd name="adj2" fmla="val 0"/>
+            </a:avLst>
+          </a:prstGeom>
+          <a:solidFill>
+            <a:schemeClr val="accent1"/>
+          </a:solidFill>
+        </p:spPr>
+        <p:txBody>
+          <a:bodyPr anchor="ctr" lIns="91440" rIns="91440" tIns="0" bIns="0"/>
+          <a:lstStyle>
+            <a:lvl1pPr algn="ctr" marL="0" indent="0">
+              <a:buNone/>
+              <a:defRPr sz="1500" b="1">
+                <a:solidFill>
+                  <a:schemeClr val="lt1"/>
+                </a:solidFill>
+              </a:defRPr>
+            </a:lvl1pPr>
+          </a:lstStyle>
+          <a:p>
+            <a:endParaRPr/>
+          </a:p>
+        </p:txBody>
+      </p:sp>
+      <p:sp>
+        <p:nvSpPr>
+          <p:cNvPr id="25" name="Card 1 Body"/>
+          <p:cNvSpPr>
+            <a:spLocks noGrp="1"/>
+          </p:cNvSpPr>
+          <p:nvPr>
+            <p:ph type="body" sz="quarter" idx="5"/>
+          </p:nvPr>
+        </p:nvSpPr>
+        <p:spPr>
+          <a:xfrm>
+            <a:off x="301752" y="2148840"/>
+            <a:ext cx="2018538" cy="4343400"/>
+          </a:xfrm>
+          <a:prstGeom prst="rect">
+            <a:avLst/>
+          </a:prstGeom>
+          <a:solidFill>
+            <a:schemeClr val="bg2"/>
+          </a:solidFill>
+        </p:spPr>
+        <p:txBody>
+          <a:bodyPr lIns="91440" rIns="91440" tIns="82296" bIns="82296">
+            <a:normAutofit/>
+          </a:bodyPr>
+          <a:lstStyle>
+            <a:lvl1pPr>
+              <a:defRPr sz="1300"/>
+            </a:lvl1pPr>
+            <a:lvl2pPr>
+              <a:defRPr sz="1100"/>
+            </a:lvl2pPr>
+          </a:lstStyle>
+          <a:p>
+            <a:endParaRPr/>
+          </a:p>
+        </p:txBody>
+      </p:sp>
+      <p:sp>
+        <p:nvSpPr>
+          <p:cNvPr id="22" name="Card 2 Tab"/>
+          <p:cNvSpPr>
+            <a:spLocks noGrp="1"/>
+          </p:cNvSpPr>
+          <p:nvPr>
+            <p:ph type="body" sz="quarter" idx="2"/>
+          </p:nvPr>
+        </p:nvSpPr>
+        <p:spPr>
+          <a:xfrm>
+            <a:off x="2475738" y="1645920"/>
+            <a:ext cx="2018538" cy="502920"/>
+          </a:xfrm>
+          <a:prstGeom prst="round2SameRect">
+            <a:avLst>
+              <a:gd name="adj1" fmla="val 25000"/>
+              <a:gd name="adj2" fmla="val 0"/>
+            </a:avLst>
+          </a:prstGeom>
+          <a:solidFill>
+            <a:schemeClr val="accent2"/>
+          </a:solidFill>
+        </p:spPr>
+        <p:txBody>
+          <a:bodyPr anchor="ctr" lIns="91440" rIns="91440" tIns="0" bIns="0"/>
+          <a:lstStyle>
+            <a:lvl1pPr algn="ctr" marL="0" indent="0">
+              <a:buNone/>
+              <a:defRPr sz="1500" b="1">
+                <a:solidFill>
+                  <a:schemeClr val="lt1"/>
+                </a:solidFill>
+              </a:defRPr>
+            </a:lvl1pPr>
+          </a:lstStyle>
+          <a:p>
+            <a:endParaRPr/>
+          </a:p>
+        </p:txBody>
+      </p:sp>
+      <p:sp>
+        <p:nvSpPr>
+          <p:cNvPr id="26" name="Card 2 Body"/>
+          <p:cNvSpPr>
+            <a:spLocks noGrp="1"/>
+          </p:cNvSpPr>
+          <p:nvPr>
+            <p:ph type="body" sz="quarter" idx="6"/>
+          </p:nvPr>
+        </p:nvSpPr>
+        <p:spPr>
+          <a:xfrm>
+            <a:off x="2475738" y="2148840"/>
+            <a:ext cx="2018538" cy="4343400"/>
+          </a:xfrm>
+          <a:prstGeom prst="rect">
+            <a:avLst/>
+          </a:prstGeom>
+          <a:solidFill>
+            <a:schemeClr val="bg2"/>
+          </a:solidFill>
+        </p:spPr>
+        <p:txBody>
+          <a:bodyPr lIns="91440" rIns="91440" tIns="82296" bIns="82296">
+            <a:normAutofit/>
+          </a:bodyPr>
+          <a:lstStyle>
+            <a:lvl1pPr>
+              <a:defRPr sz="1300"/>
+            </a:lvl1pPr>
+            <a:lvl2pPr>
+              <a:defRPr sz="1100"/>
+            </a:lvl2pPr>
+          </a:lstStyle>
+          <a:p>
+            <a:endParaRPr/>
+          </a:p>
+        </p:txBody>
+      </p:sp>
+      <p:sp>
+        <p:nvSpPr>
+          <p:cNvPr id="23" name="Card 3 Tab"/>
+          <p:cNvSpPr>
+            <a:spLocks noGrp="1"/>
+          </p:cNvSpPr>
+          <p:nvPr>
+            <p:ph type="body" sz="quarter" idx="3"/>
+          </p:nvPr>
+        </p:nvSpPr>
+        <p:spPr>
+          <a:xfrm>
+            <a:off x="4649724" y="1645920"/>
+            <a:ext cx="2018538" cy="502920"/>
+          </a:xfrm>
+          <a:prstGeom prst="round2SameRect">
+            <a:avLst>
+              <a:gd name="adj1" fmla="val 25000"/>
+              <a:gd name="adj2" fmla="val 0"/>
+            </a:avLst>
+          </a:prstGeom>
+          <a:solidFill>
+            <a:schemeClr val="accent3"/>
+          </a:solidFill>
+        </p:spPr>
+        <p:txBody>
+          <a:bodyPr anchor="ctr" lIns="91440" rIns="91440" tIns="0" bIns="0"/>
+          <a:lstStyle>
+            <a:lvl1pPr algn="ctr" marL="0" indent="0">
+              <a:buNone/>
+              <a:defRPr sz="1500" b="1">
+                <a:solidFill>
+                  <a:schemeClr val="lt1"/>
+                </a:solidFill>
+              </a:defRPr>
+            </a:lvl1pPr>
+          </a:lstStyle>
+          <a:p>
+            <a:endParaRPr/>
+          </a:p>
+        </p:txBody>
+      </p:sp>
+      <p:sp>
+        <p:nvSpPr>
+          <p:cNvPr id="27" name="Card 3 Body"/>
+          <p:cNvSpPr>
+            <a:spLocks noGrp="1"/>
+          </p:cNvSpPr>
+          <p:nvPr>
+            <p:ph type="body" sz="quarter" idx="7"/>
+          </p:nvPr>
+        </p:nvSpPr>
+        <p:spPr>
+          <a:xfrm>
+            <a:off x="4649724" y="2148840"/>
+            <a:ext cx="2018538" cy="4343400"/>
+          </a:xfrm>
+          <a:prstGeom prst="rect">
+            <a:avLst/>
+          </a:prstGeom>
+          <a:solidFill>
+            <a:schemeClr val="bg2"/>
+          </a:solidFill>
+        </p:spPr>
+        <p:txBody>
+          <a:bodyPr lIns="91440" rIns="91440" tIns="82296" bIns="82296">
+            <a:normAutofit/>
+          </a:bodyPr>
+          <a:lstStyle>
+            <a:lvl1pPr>
+              <a:defRPr sz="1300"/>
+            </a:lvl1pPr>
+            <a:lvl2pPr>
+              <a:defRPr sz="1100"/>
+            </a:lvl2pPr>
+          </a:lstStyle>
+          <a:p>
+            <a:endParaRPr/>
+          </a:p>
+        </p:txBody>
+      </p:sp>
+      <p:sp>
+        <p:nvSpPr>
+          <p:cNvPr id="24" name="Card 4 Tab"/>
+          <p:cNvSpPr>
+            <a:spLocks noGrp="1"/>
+          </p:cNvSpPr>
+          <p:nvPr>
+            <p:ph type="body" sz="quarter" idx="4"/>
+          </p:nvPr>
+        </p:nvSpPr>
+        <p:spPr>
+          <a:xfrm>
+            <a:off x="6823710" y="1645920"/>
+            <a:ext cx="2018538" cy="502920"/>
+          </a:xfrm>
+          <a:prstGeom prst="round2SameRect">
+            <a:avLst>
+              <a:gd name="adj1" fmla="val 25000"/>
+              <a:gd name="adj2" fmla="val 0"/>
+            </a:avLst>
+          </a:prstGeom>
+          <a:solidFill>
+            <a:schemeClr val="accent4"/>
+          </a:solidFill>
+        </p:spPr>
+        <p:txBody>
+          <a:bodyPr anchor="ctr" lIns="91440" rIns="91440" tIns="0" bIns="0"/>
+          <a:lstStyle>
+            <a:lvl1pPr algn="ctr" marL="0" indent="0">
+              <a:buNone/>
+              <a:defRPr sz="1500" b="1">
+                <a:solidFill>
+                  <a:schemeClr val="lt1"/>
+                </a:solidFill>
+              </a:defRPr>
+            </a:lvl1pPr>
+          </a:lstStyle>
+          <a:p>
+            <a:endParaRPr/>
+          </a:p>
+        </p:txBody>
+      </p:sp>
+      <p:sp>
+        <p:nvSpPr>
+          <p:cNvPr id="28" name="Card 4 Body"/>
+          <p:cNvSpPr>
+            <a:spLocks noGrp="1"/>
+          </p:cNvSpPr>
+          <p:nvPr>
+            <p:ph type="body" sz="quarter" idx="8"/>
+          </p:nvPr>
+        </p:nvSpPr>
+        <p:spPr>
+          <a:xfrm>
+            <a:off x="6823710" y="2148840"/>
+            <a:ext cx="2018538" cy="4343400"/>
+          </a:xfrm>
+          <a:prstGeom prst="rect">
+            <a:avLst/>
+          </a:prstGeom>
+          <a:solidFill>
+            <a:schemeClr val="bg2"/>
+          </a:solidFill>
+        </p:spPr>
+        <p:txBody>
+          <a:bodyPr lIns="91440" rIns="91440" tIns="82296" bIns="82296">
+            <a:normAutofit/>
+          </a:bodyPr>
+          <a:lstStyle>
+            <a:lvl1pPr>
+              <a:defRPr sz="1300"/>
+            </a:lvl1pPr>
+            <a:lvl2pPr>
+              <a:defRPr sz="1100"/>
+            </a:lvl2pPr>
+          </a:lstStyle>
+          <a:p>
+            <a:endParaRPr/>
           </a:p>
         </p:txBody>
       </p:sp>

--- a/examples/template.pptx
+++ b/examples/template.pptx
@@ -4,7 +4,7 @@
   <p:sldMasterIdLst>
     <p:sldMasterId id="2147483648" r:id="rId1"/>
   </p:sldMasterIdLst>
-  <p:sldSz cx="9144000" cy="6858000" type="screen4x3"/>
+  <p:sldSz cx="12192000" cy="6858000" type="screen4x3"/>
   <p:notesSz cx="6858000" cy="9144000"/>
   <p:defaultTextStyle>
     <a:defPPr>
@@ -133,8 +133,8 @@
         </p:nvSpPr>
         <p:spPr>
           <a:xfrm>
-            <a:off x="685800" y="2130425"/>
-            <a:ext cx="7772400" cy="1470025"/>
+            <a:off x="914400" y="2130425"/>
+            <a:ext cx="10363200" cy="1470025"/>
           </a:xfrm>
         </p:spPr>
         <p:txBody>
@@ -161,8 +161,8 @@
         </p:nvSpPr>
         <p:spPr>
           <a:xfrm>
-            <a:off x="1371600" y="3886200"/>
-            <a:ext cx="6400800" cy="1752600"/>
+            <a:off x="1828800" y="3886200"/>
+            <a:ext cx="8534400" cy="1752600"/>
           </a:xfrm>
         </p:spPr>
         <p:txBody>
@@ -463,8 +463,8 @@
         </p:nvSpPr>
         <p:spPr>
           <a:xfrm>
-            <a:off x="301752" y="1645920"/>
-            <a:ext cx="2018538" cy="502920"/>
+            <a:off x="402336" y="1645920"/>
+            <a:ext cx="2691384" cy="502920"/>
           </a:xfrm>
           <a:prstGeom prst="round2SameRect">
             <a:avLst>
@@ -505,8 +505,8 @@
         </p:nvSpPr>
         <p:spPr>
           <a:xfrm>
-            <a:off x="301752" y="2148840"/>
-            <a:ext cx="2018538" cy="4343400"/>
+            <a:off x="402336" y="2148840"/>
+            <a:ext cx="2691384" cy="4343400"/>
           </a:xfrm>
           <a:prstGeom prst="rect">
             <a:avLst/>
@@ -544,8 +544,8 @@
         </p:nvSpPr>
         <p:spPr>
           <a:xfrm>
-            <a:off x="2475738" y="1645920"/>
-            <a:ext cx="2018538" cy="502920"/>
+            <a:off x="3300984" y="1645920"/>
+            <a:ext cx="2691384" cy="502920"/>
           </a:xfrm>
           <a:prstGeom prst="round2SameRect">
             <a:avLst>
@@ -586,8 +586,8 @@
         </p:nvSpPr>
         <p:spPr>
           <a:xfrm>
-            <a:off x="2475738" y="2148840"/>
-            <a:ext cx="2018538" cy="4343400"/>
+            <a:off x="3300984" y="2148840"/>
+            <a:ext cx="2691384" cy="4343400"/>
           </a:xfrm>
           <a:prstGeom prst="rect">
             <a:avLst/>
@@ -625,8 +625,8 @@
         </p:nvSpPr>
         <p:spPr>
           <a:xfrm>
-            <a:off x="4649724" y="1645920"/>
-            <a:ext cx="2018538" cy="502920"/>
+            <a:off x="6199632" y="1645920"/>
+            <a:ext cx="2691384" cy="502920"/>
           </a:xfrm>
           <a:prstGeom prst="round2SameRect">
             <a:avLst>
@@ -667,8 +667,8 @@
         </p:nvSpPr>
         <p:spPr>
           <a:xfrm>
-            <a:off x="4649724" y="2148840"/>
-            <a:ext cx="2018538" cy="4343400"/>
+            <a:off x="6199632" y="2148840"/>
+            <a:ext cx="2691384" cy="4343400"/>
           </a:xfrm>
           <a:prstGeom prst="rect">
             <a:avLst/>
@@ -706,8 +706,8 @@
         </p:nvSpPr>
         <p:spPr>
           <a:xfrm>
-            <a:off x="6823710" y="1645920"/>
-            <a:ext cx="2018538" cy="502920"/>
+            <a:off x="9098280" y="1645920"/>
+            <a:ext cx="2691384" cy="502920"/>
           </a:xfrm>
           <a:prstGeom prst="round2SameRect">
             <a:avLst>
@@ -748,8 +748,8 @@
         </p:nvSpPr>
         <p:spPr>
           <a:xfrm>
-            <a:off x="6823710" y="2148840"/>
-            <a:ext cx="2018538" cy="4343400"/>
+            <a:off x="9098280" y="2148840"/>
+            <a:ext cx="2691384" cy="4343400"/>
           </a:xfrm>
           <a:prstGeom prst="rect">
             <a:avLst/>
@@ -817,8 +817,8 @@
         </p:nvSpPr>
         <p:spPr>
           <a:xfrm>
-            <a:off x="6629400" y="274638"/>
-            <a:ext cx="2057400" cy="5851525"/>
+            <a:off x="8839200" y="274638"/>
+            <a:ext cx="2743200" cy="5851525"/>
           </a:xfrm>
         </p:spPr>
         <p:txBody>
@@ -845,8 +845,8 @@
         </p:nvSpPr>
         <p:spPr>
           <a:xfrm>
-            <a:off x="457200" y="274638"/>
-            <a:ext cx="6019800" cy="5851525"/>
+            <a:off x="609600" y="274638"/>
+            <a:ext cx="8026400" cy="5851525"/>
           </a:xfrm>
         </p:spPr>
         <p:txBody>
@@ -1167,8 +1167,8 @@
         </p:nvSpPr>
         <p:spPr>
           <a:xfrm>
-            <a:off x="722313" y="4406900"/>
-            <a:ext cx="7772400" cy="1362075"/>
+            <a:off x="963084" y="4406900"/>
+            <a:ext cx="10363200" cy="1362075"/>
           </a:xfrm>
         </p:spPr>
         <p:txBody>
@@ -1199,8 +1199,8 @@
         </p:nvSpPr>
         <p:spPr>
           <a:xfrm>
-            <a:off x="722313" y="2906713"/>
-            <a:ext cx="7772400" cy="1500187"/>
+            <a:off x="963084" y="2906713"/>
+            <a:ext cx="10363200" cy="1500187"/>
           </a:xfrm>
         </p:spPr>
         <p:txBody>
@@ -1436,8 +1436,8 @@
         </p:nvSpPr>
         <p:spPr>
           <a:xfrm>
-            <a:off x="457200" y="1600200"/>
-            <a:ext cx="4038600" cy="4525963"/>
+            <a:off x="609600" y="1600200"/>
+            <a:ext cx="5384800" cy="4525963"/>
           </a:xfrm>
         </p:spPr>
         <p:txBody>
@@ -1521,8 +1521,8 @@
         </p:nvSpPr>
         <p:spPr>
           <a:xfrm>
-            <a:off x="4648200" y="1600200"/>
-            <a:ext cx="4038600" cy="4525963"/>
+            <a:off x="6197600" y="1600200"/>
+            <a:ext cx="5384800" cy="4525963"/>
           </a:xfrm>
         </p:spPr>
         <p:txBody>
@@ -1728,8 +1728,8 @@
         </p:nvSpPr>
         <p:spPr>
           <a:xfrm>
-            <a:off x="457200" y="1535113"/>
-            <a:ext cx="4040188" cy="639762"/>
+            <a:off x="609600" y="1535113"/>
+            <a:ext cx="5386917" cy="639762"/>
           </a:xfrm>
         </p:spPr>
         <p:txBody>
@@ -1793,8 +1793,8 @@
         </p:nvSpPr>
         <p:spPr>
           <a:xfrm>
-            <a:off x="457200" y="2174875"/>
-            <a:ext cx="4040188" cy="3951288"/>
+            <a:off x="609600" y="2174875"/>
+            <a:ext cx="5386917" cy="3951288"/>
           </a:xfrm>
         </p:spPr>
         <p:txBody>
@@ -1878,8 +1878,8 @@
         </p:nvSpPr>
         <p:spPr>
           <a:xfrm>
-            <a:off x="4645025" y="1535113"/>
-            <a:ext cx="4041775" cy="639762"/>
+            <a:off x="6193367" y="1535113"/>
+            <a:ext cx="5389033" cy="639762"/>
           </a:xfrm>
         </p:spPr>
         <p:txBody>
@@ -1943,8 +1943,8 @@
         </p:nvSpPr>
         <p:spPr>
           <a:xfrm>
-            <a:off x="4645025" y="2174875"/>
-            <a:ext cx="4041775" cy="3951288"/>
+            <a:off x="6193367" y="2174875"/>
+            <a:ext cx="5389033" cy="3951288"/>
           </a:xfrm>
         </p:spPr>
         <p:txBody>
@@ -2336,8 +2336,8 @@
         </p:nvSpPr>
         <p:spPr>
           <a:xfrm>
-            <a:off x="457200" y="273050"/>
-            <a:ext cx="3008313" cy="1162050"/>
+            <a:off x="609600" y="273050"/>
+            <a:ext cx="4011084" cy="1162050"/>
           </a:xfrm>
         </p:spPr>
         <p:txBody>
@@ -2368,8 +2368,8 @@
         </p:nvSpPr>
         <p:spPr>
           <a:xfrm>
-            <a:off x="3575050" y="273050"/>
-            <a:ext cx="5111750" cy="5853113"/>
+            <a:off x="4766733" y="273050"/>
+            <a:ext cx="6815667" cy="5853113"/>
           </a:xfrm>
         </p:spPr>
         <p:txBody>
@@ -2453,8 +2453,8 @@
         </p:nvSpPr>
         <p:spPr>
           <a:xfrm>
-            <a:off x="457200" y="1435100"/>
-            <a:ext cx="3008313" cy="4691063"/>
+            <a:off x="609600" y="1435100"/>
+            <a:ext cx="4011084" cy="4691063"/>
           </a:xfrm>
         </p:spPr>
         <p:txBody>
@@ -2613,8 +2613,8 @@
         </p:nvSpPr>
         <p:spPr>
           <a:xfrm>
-            <a:off x="1792288" y="4800600"/>
-            <a:ext cx="5486400" cy="566738"/>
+            <a:off x="2389717" y="4800600"/>
+            <a:ext cx="7315200" cy="566738"/>
           </a:xfrm>
         </p:spPr>
         <p:txBody>
@@ -2645,8 +2645,8 @@
         </p:nvSpPr>
         <p:spPr>
           <a:xfrm>
-            <a:off x="1792288" y="612775"/>
-            <a:ext cx="5486400" cy="4114800"/>
+            <a:off x="2389717" y="612775"/>
+            <a:ext cx="7315200" cy="4114800"/>
           </a:xfrm>
         </p:spPr>
         <p:txBody>
@@ -2706,8 +2706,8 @@
         </p:nvSpPr>
         <p:spPr>
           <a:xfrm>
-            <a:off x="1792288" y="5367338"/>
-            <a:ext cx="5486400" cy="804862"/>
+            <a:off x="2389717" y="5367338"/>
+            <a:ext cx="7315200" cy="804862"/>
           </a:xfrm>
         </p:spPr>
         <p:txBody>
@@ -2871,8 +2871,8 @@
         </p:nvSpPr>
         <p:spPr>
           <a:xfrm>
-            <a:off x="457200" y="274638"/>
-            <a:ext cx="8229600" cy="1143000"/>
+            <a:off x="609600" y="274638"/>
+            <a:ext cx="10972800" cy="1143000"/>
           </a:xfrm>
           <a:prstGeom prst="rect">
             <a:avLst/>
@@ -2904,8 +2904,8 @@
         </p:nvSpPr>
         <p:spPr>
           <a:xfrm>
-            <a:off x="457200" y="1600200"/>
-            <a:ext cx="8229600" cy="4525963"/>
+            <a:off x="609600" y="1600200"/>
+            <a:ext cx="10972800" cy="4525963"/>
           </a:xfrm>
           <a:prstGeom prst="rect">
             <a:avLst/>
@@ -2966,8 +2966,8 @@
         </p:nvSpPr>
         <p:spPr>
           <a:xfrm>
-            <a:off x="457200" y="6356350"/>
-            <a:ext cx="2133600" cy="365125"/>
+            <a:off x="609600" y="6356350"/>
+            <a:ext cx="2844800" cy="365125"/>
           </a:xfrm>
           <a:prstGeom prst="rect">
             <a:avLst/>
@@ -3007,8 +3007,8 @@
         </p:nvSpPr>
         <p:spPr>
           <a:xfrm>
-            <a:off x="3124200" y="6356350"/>
-            <a:ext cx="2895600" cy="365125"/>
+            <a:off x="4165600" y="6356350"/>
+            <a:ext cx="3860800" cy="365125"/>
           </a:xfrm>
           <a:prstGeom prst="rect">
             <a:avLst/>
@@ -3044,8 +3044,8 @@
         </p:nvSpPr>
         <p:spPr>
           <a:xfrm>
-            <a:off x="6553200" y="6356350"/>
-            <a:ext cx="2133600" cy="365125"/>
+            <a:off x="8737600" y="6356350"/>
+            <a:ext cx="2844800" cy="365125"/>
           </a:xfrm>
           <a:prstGeom prst="rect">
             <a:avLst/>
